--- a/assets/pptx/catalog-566.pptx
+++ b/assets/pptx/catalog-566.pptx
@@ -3268,7 +3268,7 @@
                 <a:ea typeface="Ebrima"/>
                 <a:cs typeface="Ebrima"/>
               </a:rPr>
-              <a:t>ዘዴ አልው እንዴት እንደሚያደርግ ያውቃል (2x)</a:t>
+              <a:t>ዘዴ አልው እንዴት እንደሚያደርግ ያውቃል 2x</a:t>
             </a:r>
           </a:p>
           <a:p>
@@ -3389,7 +3389,7 @@
                 <a:ea typeface="Ebrima"/>
                 <a:cs typeface="Ebrima"/>
               </a:rPr>
-              <a:t>እንደ ዘዴው ያርግ ዘንድ እንደ ዘዴው (4x)</a:t>
+              <a:t>እንደ ዘዴው ያርግ ዘንድ እንደ ዘዴው 4x</a:t>
             </a:r>
           </a:p>
           <a:p>
@@ -3510,7 +3510,7 @@
                 <a:ea typeface="Ebrima"/>
                 <a:cs typeface="Ebrima"/>
               </a:rPr>
-              <a:t>ትቼለታለሁ የእኔን ታሪክ (2x)</a:t>
+              <a:t>ትቼለታለሁ የእኔን ታሪክ 2x</a:t>
             </a:r>
           </a:p>
         </p:txBody>
@@ -3595,7 +3595,7 @@
                 <a:ea typeface="Ebrima"/>
                 <a:cs typeface="Ebrima"/>
               </a:rPr>
-              <a:t>ዘዴ አልው እንዴት እንደሚያደርግ ያውቃል (2x)</a:t>
+              <a:t>ዘዴ አልው እንዴት እንደሚያደርግ ያውቃል 2x</a:t>
             </a:r>
           </a:p>
           <a:p>
@@ -3716,7 +3716,7 @@
                 <a:ea typeface="Ebrima"/>
                 <a:cs typeface="Ebrima"/>
               </a:rPr>
-              <a:t>እንደ ዘዴው ያርግ ዘንድ እንደ ዘዴው (4x)</a:t>
+              <a:t>እንደ ዘዴው ያርግ ዘንድ እንደ ዘዴው 4x</a:t>
             </a:r>
           </a:p>
           <a:p>
@@ -3837,7 +3837,7 @@
                 <a:ea typeface="Ebrima"/>
                 <a:cs typeface="Ebrima"/>
               </a:rPr>
-              <a:t>ትቼዋለታለሁ የእኔን ታሪክ (2x)</a:t>
+              <a:t>ትቼዋለታለሁ የእኔን ታሪክ 2x</a:t>
             </a:r>
           </a:p>
         </p:txBody>
@@ -3922,7 +3922,7 @@
                 <a:ea typeface="Ebrima"/>
                 <a:cs typeface="Ebrima"/>
               </a:rPr>
-              <a:t>ዘዴ አልው እንዴት እንደሚያደርግ ያውቃል (2x)</a:t>
+              <a:t>ዘዴ አልው እንዴት እንደሚያደርግ ያውቃል 2x</a:t>
             </a:r>
           </a:p>
           <a:p>
@@ -4043,7 +4043,7 @@
                 <a:ea typeface="Ebrima"/>
                 <a:cs typeface="Ebrima"/>
               </a:rPr>
-              <a:t>እንደ ዘዴው ያርግ ዘንድ እንደ ዘዴው (4x)</a:t>
+              <a:t>እንደ ዘዴው ያርግ ዘንድ እንደ ዘዴው 4x</a:t>
             </a:r>
           </a:p>
           <a:p>
@@ -4236,7 +4236,7 @@
                 <a:ea typeface="Ebrima"/>
                 <a:cs typeface="Ebrima"/>
               </a:rPr>
-              <a:t>ሁሉን ለእርሱ ጥዬ እነሳለሁ (2x)</a:t>
+              <a:t>ሁሉን ለእርሱ ጥዬ እነሳለሁ 2x</a:t>
             </a:r>
           </a:p>
         </p:txBody>
@@ -4321,7 +4321,7 @@
                 <a:ea typeface="Ebrima"/>
                 <a:cs typeface="Ebrima"/>
               </a:rPr>
-              <a:t>ትቼለታለሁ የእኔን ታሪክ (2x)</a:t>
+              <a:t>ትቼለታለሁ የእኔን ታሪክ 2x</a:t>
             </a:r>
           </a:p>
         </p:txBody>
